--- a/public/videos/repositories/anchor-suggest-search/anchor-suggest-search-tech-preview.pptx
+++ b/public/videos/repositories/anchor-suggest-search/anchor-suggest-search-tech-preview.pptx
@@ -134,7 +134,7 @@
           <p:cNvPr id="2" name="タイトル 1">
             <a:extLst>
               <a:ext uri="{FF2B5EF4-FFF2-40B4-BE49-F238E27FC236}">
-                <a16:creationId xmlns:a16="http://schemas.microsoft.com/office/drawing/2014/main" id="{92477125-DA8C-174B-D8B5-450D537FF109}"/>
+                <a16:creationId xmlns:a16="http://schemas.microsoft.com/office/drawing/2014/main" id="{3E51B26A-534E-20C4-53AF-9CC43D370ADB}"/>
               </a:ext>
             </a:extLst>
           </p:cNvPr>
@@ -171,7 +171,7 @@
           <p:cNvPr id="3" name="字幕 2">
             <a:extLst>
               <a:ext uri="{FF2B5EF4-FFF2-40B4-BE49-F238E27FC236}">
-                <a16:creationId xmlns:a16="http://schemas.microsoft.com/office/drawing/2014/main" id="{16A8D740-B405-3A75-BF2D-B0B3694DB9DE}"/>
+                <a16:creationId xmlns:a16="http://schemas.microsoft.com/office/drawing/2014/main" id="{D3F4A981-178C-8E9F-F08E-321C71E6D5FC}"/>
               </a:ext>
             </a:extLst>
           </p:cNvPr>
@@ -241,7 +241,7 @@
           <p:cNvPr id="4" name="日付プレースホルダー 3">
             <a:extLst>
               <a:ext uri="{FF2B5EF4-FFF2-40B4-BE49-F238E27FC236}">
-                <a16:creationId xmlns:a16="http://schemas.microsoft.com/office/drawing/2014/main" id="{1A4C591D-81AD-38DE-69C4-BF0AFC972407}"/>
+                <a16:creationId xmlns:a16="http://schemas.microsoft.com/office/drawing/2014/main" id="{4737105A-B43B-0342-D204-FD504C7FC354}"/>
               </a:ext>
             </a:extLst>
           </p:cNvPr>
@@ -257,7 +257,7 @@
           <a:bodyPr/>
           <a:lstStyle/>
           <a:p>
-            <a:fld id="{DF3A6EFA-88EA-4349-A907-4CCED1D37C3D}" type="datetimeFigureOut">
+            <a:fld id="{6BDD9C9E-7EEE-42A7-A8E8-05EE873ECF07}" type="datetimeFigureOut">
               <a:rPr kumimoji="1" lang="ja-JP" altLang="en-US" smtClean="0"/>
               <a:t>2026/7/30</a:t>
             </a:fld>
@@ -270,7 +270,7 @@
           <p:cNvPr id="5" name="フッター プレースホルダー 4">
             <a:extLst>
               <a:ext uri="{FF2B5EF4-FFF2-40B4-BE49-F238E27FC236}">
-                <a16:creationId xmlns:a16="http://schemas.microsoft.com/office/drawing/2014/main" id="{B4BF4F2E-5D4C-F142-0F0E-E4EF00FAE12D}"/>
+                <a16:creationId xmlns:a16="http://schemas.microsoft.com/office/drawing/2014/main" id="{5032190D-E186-9AAA-0CDE-7FFBEF7A5B8D}"/>
               </a:ext>
             </a:extLst>
           </p:cNvPr>
@@ -295,7 +295,7 @@
           <p:cNvPr id="6" name="スライド番号プレースホルダー 5">
             <a:extLst>
               <a:ext uri="{FF2B5EF4-FFF2-40B4-BE49-F238E27FC236}">
-                <a16:creationId xmlns:a16="http://schemas.microsoft.com/office/drawing/2014/main" id="{81752AB9-3F11-67B1-188B-A226DD2EDD36}"/>
+                <a16:creationId xmlns:a16="http://schemas.microsoft.com/office/drawing/2014/main" id="{8C99B0BD-4016-233E-9442-6E0583816122}"/>
               </a:ext>
             </a:extLst>
           </p:cNvPr>
@@ -311,7 +311,7 @@
           <a:bodyPr/>
           <a:lstStyle/>
           <a:p>
-            <a:fld id="{76AEAAE9-A891-4A45-9E32-2D4073FAA241}" type="slidenum">
+            <a:fld id="{08EBE590-C0B3-4EE4-8B51-79293CFBB6A6}" type="slidenum">
               <a:rPr kumimoji="1" lang="ja-JP" altLang="en-US" smtClean="0"/>
               <a:t>‹#›</a:t>
             </a:fld>
@@ -322,7 +322,7 @@
     </p:spTree>
     <p:extLst>
       <p:ext uri="{BB962C8B-B14F-4D97-AF65-F5344CB8AC3E}">
-        <p14:creationId xmlns:p14="http://schemas.microsoft.com/office/powerpoint/2010/main" val="3159392956"/>
+        <p14:creationId xmlns:p14="http://schemas.microsoft.com/office/powerpoint/2010/main" val="3825046410"/>
       </p:ext>
     </p:extLst>
   </p:cSld>
@@ -354,7 +354,7 @@
           <p:cNvPr id="2" name="タイトル 1">
             <a:extLst>
               <a:ext uri="{FF2B5EF4-FFF2-40B4-BE49-F238E27FC236}">
-                <a16:creationId xmlns:a16="http://schemas.microsoft.com/office/drawing/2014/main" id="{B4928A84-429C-D271-11C6-FF4D4C1AC56A}"/>
+                <a16:creationId xmlns:a16="http://schemas.microsoft.com/office/drawing/2014/main" id="{0DB1B954-ECB2-B076-F0C5-8CC83944FA7C}"/>
               </a:ext>
             </a:extLst>
           </p:cNvPr>
@@ -382,7 +382,7 @@
           <p:cNvPr id="3" name="縦書きテキスト プレースホルダー 2">
             <a:extLst>
               <a:ext uri="{FF2B5EF4-FFF2-40B4-BE49-F238E27FC236}">
-                <a16:creationId xmlns:a16="http://schemas.microsoft.com/office/drawing/2014/main" id="{C21B4890-15ED-43E7-5E4B-8B109BD30744}"/>
+                <a16:creationId xmlns:a16="http://schemas.microsoft.com/office/drawing/2014/main" id="{F0318968-7054-B0FF-88AE-9F5E4941AA8F}"/>
               </a:ext>
             </a:extLst>
           </p:cNvPr>
@@ -471,7 +471,7 @@
           <p:cNvPr id="4" name="日付プレースホルダー 3">
             <a:extLst>
               <a:ext uri="{FF2B5EF4-FFF2-40B4-BE49-F238E27FC236}">
-                <a16:creationId xmlns:a16="http://schemas.microsoft.com/office/drawing/2014/main" id="{B1FD85A5-3CE2-CB51-EA0C-252EBCBFAF59}"/>
+                <a16:creationId xmlns:a16="http://schemas.microsoft.com/office/drawing/2014/main" id="{EDFD2902-E540-98F0-4130-899A5A9CDAA8}"/>
               </a:ext>
             </a:extLst>
           </p:cNvPr>
@@ -487,7 +487,7 @@
           <a:bodyPr/>
           <a:lstStyle/>
           <a:p>
-            <a:fld id="{DF3A6EFA-88EA-4349-A907-4CCED1D37C3D}" type="datetimeFigureOut">
+            <a:fld id="{6BDD9C9E-7EEE-42A7-A8E8-05EE873ECF07}" type="datetimeFigureOut">
               <a:rPr kumimoji="1" lang="ja-JP" altLang="en-US" smtClean="0"/>
               <a:t>2026/7/30</a:t>
             </a:fld>
@@ -500,7 +500,7 @@
           <p:cNvPr id="5" name="フッター プレースホルダー 4">
             <a:extLst>
               <a:ext uri="{FF2B5EF4-FFF2-40B4-BE49-F238E27FC236}">
-                <a16:creationId xmlns:a16="http://schemas.microsoft.com/office/drawing/2014/main" id="{C267C182-CB35-7992-1111-ACE343BC7C24}"/>
+                <a16:creationId xmlns:a16="http://schemas.microsoft.com/office/drawing/2014/main" id="{28CC6075-1124-78BE-F466-D3C787C83307}"/>
               </a:ext>
             </a:extLst>
           </p:cNvPr>
@@ -525,7 +525,7 @@
           <p:cNvPr id="6" name="スライド番号プレースホルダー 5">
             <a:extLst>
               <a:ext uri="{FF2B5EF4-FFF2-40B4-BE49-F238E27FC236}">
-                <a16:creationId xmlns:a16="http://schemas.microsoft.com/office/drawing/2014/main" id="{A50D12DA-FC6C-FDF9-8FA2-878542C43898}"/>
+                <a16:creationId xmlns:a16="http://schemas.microsoft.com/office/drawing/2014/main" id="{BE969818-5E2A-A8E5-3AF5-4F12302A136C}"/>
               </a:ext>
             </a:extLst>
           </p:cNvPr>
@@ -541,7 +541,7 @@
           <a:bodyPr/>
           <a:lstStyle/>
           <a:p>
-            <a:fld id="{76AEAAE9-A891-4A45-9E32-2D4073FAA241}" type="slidenum">
+            <a:fld id="{08EBE590-C0B3-4EE4-8B51-79293CFBB6A6}" type="slidenum">
               <a:rPr kumimoji="1" lang="ja-JP" altLang="en-US" smtClean="0"/>
               <a:t>‹#›</a:t>
             </a:fld>
@@ -552,7 +552,7 @@
     </p:spTree>
     <p:extLst>
       <p:ext uri="{BB962C8B-B14F-4D97-AF65-F5344CB8AC3E}">
-        <p14:creationId xmlns:p14="http://schemas.microsoft.com/office/powerpoint/2010/main" val="2832532799"/>
+        <p14:creationId xmlns:p14="http://schemas.microsoft.com/office/powerpoint/2010/main" val="966846775"/>
       </p:ext>
     </p:extLst>
   </p:cSld>
@@ -584,7 +584,7 @@
           <p:cNvPr id="2" name="縦書きタイトル 1">
             <a:extLst>
               <a:ext uri="{FF2B5EF4-FFF2-40B4-BE49-F238E27FC236}">
-                <a16:creationId xmlns:a16="http://schemas.microsoft.com/office/drawing/2014/main" id="{2C0A7D71-77A4-BC17-8976-BA0FE6A8A690}"/>
+                <a16:creationId xmlns:a16="http://schemas.microsoft.com/office/drawing/2014/main" id="{186271E4-3DB5-99D3-9187-034A79D3B279}"/>
               </a:ext>
             </a:extLst>
           </p:cNvPr>
@@ -617,7 +617,7 @@
           <p:cNvPr id="3" name="縦書きテキスト プレースホルダー 2">
             <a:extLst>
               <a:ext uri="{FF2B5EF4-FFF2-40B4-BE49-F238E27FC236}">
-                <a16:creationId xmlns:a16="http://schemas.microsoft.com/office/drawing/2014/main" id="{14ACFECD-55AA-77C1-D42C-B6BC0D6CF75E}"/>
+                <a16:creationId xmlns:a16="http://schemas.microsoft.com/office/drawing/2014/main" id="{805840FB-A9A9-4EAA-D917-D9EE54E2E7B7}"/>
               </a:ext>
             </a:extLst>
           </p:cNvPr>
@@ -711,7 +711,7 @@
           <p:cNvPr id="4" name="日付プレースホルダー 3">
             <a:extLst>
               <a:ext uri="{FF2B5EF4-FFF2-40B4-BE49-F238E27FC236}">
-                <a16:creationId xmlns:a16="http://schemas.microsoft.com/office/drawing/2014/main" id="{68E9258C-1ACF-6538-75F0-ADCAD53AD15D}"/>
+                <a16:creationId xmlns:a16="http://schemas.microsoft.com/office/drawing/2014/main" id="{ACF243F7-CE6F-E319-046D-0B2D862E625C}"/>
               </a:ext>
             </a:extLst>
           </p:cNvPr>
@@ -727,7 +727,7 @@
           <a:bodyPr/>
           <a:lstStyle/>
           <a:p>
-            <a:fld id="{DF3A6EFA-88EA-4349-A907-4CCED1D37C3D}" type="datetimeFigureOut">
+            <a:fld id="{6BDD9C9E-7EEE-42A7-A8E8-05EE873ECF07}" type="datetimeFigureOut">
               <a:rPr kumimoji="1" lang="ja-JP" altLang="en-US" smtClean="0"/>
               <a:t>2026/7/30</a:t>
             </a:fld>
@@ -740,7 +740,7 @@
           <p:cNvPr id="5" name="フッター プレースホルダー 4">
             <a:extLst>
               <a:ext uri="{FF2B5EF4-FFF2-40B4-BE49-F238E27FC236}">
-                <a16:creationId xmlns:a16="http://schemas.microsoft.com/office/drawing/2014/main" id="{AEB74635-9943-F310-D05F-11F51055BB12}"/>
+                <a16:creationId xmlns:a16="http://schemas.microsoft.com/office/drawing/2014/main" id="{9B1F6E5C-A28F-5C82-7BD4-D71E5E67F915}"/>
               </a:ext>
             </a:extLst>
           </p:cNvPr>
@@ -765,7 +765,7 @@
           <p:cNvPr id="6" name="スライド番号プレースホルダー 5">
             <a:extLst>
               <a:ext uri="{FF2B5EF4-FFF2-40B4-BE49-F238E27FC236}">
-                <a16:creationId xmlns:a16="http://schemas.microsoft.com/office/drawing/2014/main" id="{8A0B2793-A204-3FDF-306E-C8D2BC666E86}"/>
+                <a16:creationId xmlns:a16="http://schemas.microsoft.com/office/drawing/2014/main" id="{D80B6D5C-1423-9653-7C60-7D1EB2D62F2D}"/>
               </a:ext>
             </a:extLst>
           </p:cNvPr>
@@ -781,7 +781,7 @@
           <a:bodyPr/>
           <a:lstStyle/>
           <a:p>
-            <a:fld id="{76AEAAE9-A891-4A45-9E32-2D4073FAA241}" type="slidenum">
+            <a:fld id="{08EBE590-C0B3-4EE4-8B51-79293CFBB6A6}" type="slidenum">
               <a:rPr kumimoji="1" lang="ja-JP" altLang="en-US" smtClean="0"/>
               <a:t>‹#›</a:t>
             </a:fld>
@@ -792,7 +792,7 @@
     </p:spTree>
     <p:extLst>
       <p:ext uri="{BB962C8B-B14F-4D97-AF65-F5344CB8AC3E}">
-        <p14:creationId xmlns:p14="http://schemas.microsoft.com/office/powerpoint/2010/main" val="1962411107"/>
+        <p14:creationId xmlns:p14="http://schemas.microsoft.com/office/powerpoint/2010/main" val="3577399930"/>
       </p:ext>
     </p:extLst>
   </p:cSld>
@@ -824,7 +824,7 @@
           <p:cNvPr id="2" name="タイトル 1">
             <a:extLst>
               <a:ext uri="{FF2B5EF4-FFF2-40B4-BE49-F238E27FC236}">
-                <a16:creationId xmlns:a16="http://schemas.microsoft.com/office/drawing/2014/main" id="{67E97C97-5136-EF55-4557-FE7367B1B1AC}"/>
+                <a16:creationId xmlns:a16="http://schemas.microsoft.com/office/drawing/2014/main" id="{2AA989F8-B4A1-01E8-2A8A-1DFF2B04E3F3}"/>
               </a:ext>
             </a:extLst>
           </p:cNvPr>
@@ -852,7 +852,7 @@
           <p:cNvPr id="3" name="コンテンツ プレースホルダー 2">
             <a:extLst>
               <a:ext uri="{FF2B5EF4-FFF2-40B4-BE49-F238E27FC236}">
-                <a16:creationId xmlns:a16="http://schemas.microsoft.com/office/drawing/2014/main" id="{B460D11F-555B-D15C-3004-60B54206EE02}"/>
+                <a16:creationId xmlns:a16="http://schemas.microsoft.com/office/drawing/2014/main" id="{21582014-DB71-7983-F486-195FE32F9854}"/>
               </a:ext>
             </a:extLst>
           </p:cNvPr>
@@ -941,7 +941,7 @@
           <p:cNvPr id="4" name="日付プレースホルダー 3">
             <a:extLst>
               <a:ext uri="{FF2B5EF4-FFF2-40B4-BE49-F238E27FC236}">
-                <a16:creationId xmlns:a16="http://schemas.microsoft.com/office/drawing/2014/main" id="{174793DB-920F-8DA7-AB5B-05B40FFDCBBB}"/>
+                <a16:creationId xmlns:a16="http://schemas.microsoft.com/office/drawing/2014/main" id="{B766469D-A92E-37B1-E46C-ABF7D4133F97}"/>
               </a:ext>
             </a:extLst>
           </p:cNvPr>
@@ -957,7 +957,7 @@
           <a:bodyPr/>
           <a:lstStyle/>
           <a:p>
-            <a:fld id="{DF3A6EFA-88EA-4349-A907-4CCED1D37C3D}" type="datetimeFigureOut">
+            <a:fld id="{6BDD9C9E-7EEE-42A7-A8E8-05EE873ECF07}" type="datetimeFigureOut">
               <a:rPr kumimoji="1" lang="ja-JP" altLang="en-US" smtClean="0"/>
               <a:t>2026/7/30</a:t>
             </a:fld>
@@ -970,7 +970,7 @@
           <p:cNvPr id="5" name="フッター プレースホルダー 4">
             <a:extLst>
               <a:ext uri="{FF2B5EF4-FFF2-40B4-BE49-F238E27FC236}">
-                <a16:creationId xmlns:a16="http://schemas.microsoft.com/office/drawing/2014/main" id="{8BAD5520-5BED-88E9-E73D-FC27A6F7B174}"/>
+                <a16:creationId xmlns:a16="http://schemas.microsoft.com/office/drawing/2014/main" id="{5D1796BF-AD5C-8B8A-0A11-04FB52FF157E}"/>
               </a:ext>
             </a:extLst>
           </p:cNvPr>
@@ -995,7 +995,7 @@
           <p:cNvPr id="6" name="スライド番号プレースホルダー 5">
             <a:extLst>
               <a:ext uri="{FF2B5EF4-FFF2-40B4-BE49-F238E27FC236}">
-                <a16:creationId xmlns:a16="http://schemas.microsoft.com/office/drawing/2014/main" id="{33947828-BD4C-0891-03FF-B390D37CE87B}"/>
+                <a16:creationId xmlns:a16="http://schemas.microsoft.com/office/drawing/2014/main" id="{BC4B9C36-9A48-20C0-4A8B-77D75272D95E}"/>
               </a:ext>
             </a:extLst>
           </p:cNvPr>
@@ -1011,7 +1011,7 @@
           <a:bodyPr/>
           <a:lstStyle/>
           <a:p>
-            <a:fld id="{76AEAAE9-A891-4A45-9E32-2D4073FAA241}" type="slidenum">
+            <a:fld id="{08EBE590-C0B3-4EE4-8B51-79293CFBB6A6}" type="slidenum">
               <a:rPr kumimoji="1" lang="ja-JP" altLang="en-US" smtClean="0"/>
               <a:t>‹#›</a:t>
             </a:fld>
@@ -1022,7 +1022,7 @@
     </p:spTree>
     <p:extLst>
       <p:ext uri="{BB962C8B-B14F-4D97-AF65-F5344CB8AC3E}">
-        <p14:creationId xmlns:p14="http://schemas.microsoft.com/office/powerpoint/2010/main" val="1912335295"/>
+        <p14:creationId xmlns:p14="http://schemas.microsoft.com/office/powerpoint/2010/main" val="1672847489"/>
       </p:ext>
     </p:extLst>
   </p:cSld>
@@ -1054,7 +1054,7 @@
           <p:cNvPr id="2" name="タイトル 1">
             <a:extLst>
               <a:ext uri="{FF2B5EF4-FFF2-40B4-BE49-F238E27FC236}">
-                <a16:creationId xmlns:a16="http://schemas.microsoft.com/office/drawing/2014/main" id="{63237B90-3B1D-2243-512A-D28FDE6059A2}"/>
+                <a16:creationId xmlns:a16="http://schemas.microsoft.com/office/drawing/2014/main" id="{A4D2382C-9532-237D-F56A-D2369C1AA599}"/>
               </a:ext>
             </a:extLst>
           </p:cNvPr>
@@ -1091,7 +1091,7 @@
           <p:cNvPr id="3" name="テキスト プレースホルダー 2">
             <a:extLst>
               <a:ext uri="{FF2B5EF4-FFF2-40B4-BE49-F238E27FC236}">
-                <a16:creationId xmlns:a16="http://schemas.microsoft.com/office/drawing/2014/main" id="{040082FB-1474-AB27-68AC-029AD440A595}"/>
+                <a16:creationId xmlns:a16="http://schemas.microsoft.com/office/drawing/2014/main" id="{07E6FE85-CC74-4AF0-6764-D8E1130DAC87}"/>
               </a:ext>
             </a:extLst>
           </p:cNvPr>
@@ -1216,7 +1216,7 @@
           <p:cNvPr id="4" name="日付プレースホルダー 3">
             <a:extLst>
               <a:ext uri="{FF2B5EF4-FFF2-40B4-BE49-F238E27FC236}">
-                <a16:creationId xmlns:a16="http://schemas.microsoft.com/office/drawing/2014/main" id="{980015D8-DDF9-4F74-211E-DC68B4CAAE14}"/>
+                <a16:creationId xmlns:a16="http://schemas.microsoft.com/office/drawing/2014/main" id="{C3D6D1B0-6E72-5135-4A62-C736A15BD5B5}"/>
               </a:ext>
             </a:extLst>
           </p:cNvPr>
@@ -1232,7 +1232,7 @@
           <a:bodyPr/>
           <a:lstStyle/>
           <a:p>
-            <a:fld id="{DF3A6EFA-88EA-4349-A907-4CCED1D37C3D}" type="datetimeFigureOut">
+            <a:fld id="{6BDD9C9E-7EEE-42A7-A8E8-05EE873ECF07}" type="datetimeFigureOut">
               <a:rPr kumimoji="1" lang="ja-JP" altLang="en-US" smtClean="0"/>
               <a:t>2026/7/30</a:t>
             </a:fld>
@@ -1245,7 +1245,7 @@
           <p:cNvPr id="5" name="フッター プレースホルダー 4">
             <a:extLst>
               <a:ext uri="{FF2B5EF4-FFF2-40B4-BE49-F238E27FC236}">
-                <a16:creationId xmlns:a16="http://schemas.microsoft.com/office/drawing/2014/main" id="{D38986BB-6A04-68BD-85A5-CA7D4C776749}"/>
+                <a16:creationId xmlns:a16="http://schemas.microsoft.com/office/drawing/2014/main" id="{7BA778C6-69EC-7EBD-D49F-B9CE7F04F996}"/>
               </a:ext>
             </a:extLst>
           </p:cNvPr>
@@ -1270,7 +1270,7 @@
           <p:cNvPr id="6" name="スライド番号プレースホルダー 5">
             <a:extLst>
               <a:ext uri="{FF2B5EF4-FFF2-40B4-BE49-F238E27FC236}">
-                <a16:creationId xmlns:a16="http://schemas.microsoft.com/office/drawing/2014/main" id="{E1A31EF4-9872-5BBF-52AD-B18DDF607572}"/>
+                <a16:creationId xmlns:a16="http://schemas.microsoft.com/office/drawing/2014/main" id="{C4B983F0-9DDC-E708-6057-F226BD35D209}"/>
               </a:ext>
             </a:extLst>
           </p:cNvPr>
@@ -1286,7 +1286,7 @@
           <a:bodyPr/>
           <a:lstStyle/>
           <a:p>
-            <a:fld id="{76AEAAE9-A891-4A45-9E32-2D4073FAA241}" type="slidenum">
+            <a:fld id="{08EBE590-C0B3-4EE4-8B51-79293CFBB6A6}" type="slidenum">
               <a:rPr kumimoji="1" lang="ja-JP" altLang="en-US" smtClean="0"/>
               <a:t>‹#›</a:t>
             </a:fld>
@@ -1297,7 +1297,7 @@
     </p:spTree>
     <p:extLst>
       <p:ext uri="{BB962C8B-B14F-4D97-AF65-F5344CB8AC3E}">
-        <p14:creationId xmlns:p14="http://schemas.microsoft.com/office/powerpoint/2010/main" val="2770883231"/>
+        <p14:creationId xmlns:p14="http://schemas.microsoft.com/office/powerpoint/2010/main" val="3059025427"/>
       </p:ext>
     </p:extLst>
   </p:cSld>
@@ -1329,7 +1329,7 @@
           <p:cNvPr id="2" name="タイトル 1">
             <a:extLst>
               <a:ext uri="{FF2B5EF4-FFF2-40B4-BE49-F238E27FC236}">
-                <a16:creationId xmlns:a16="http://schemas.microsoft.com/office/drawing/2014/main" id="{74E36679-CA47-26FE-DC72-D34396EC5DB6}"/>
+                <a16:creationId xmlns:a16="http://schemas.microsoft.com/office/drawing/2014/main" id="{D85EB9AE-95E8-0F14-ECBF-8ED84DED31C8}"/>
               </a:ext>
             </a:extLst>
           </p:cNvPr>
@@ -1357,7 +1357,7 @@
           <p:cNvPr id="3" name="コンテンツ プレースホルダー 2">
             <a:extLst>
               <a:ext uri="{FF2B5EF4-FFF2-40B4-BE49-F238E27FC236}">
-                <a16:creationId xmlns:a16="http://schemas.microsoft.com/office/drawing/2014/main" id="{D50E897B-18F9-42F5-3741-25DCC3E2A91B}"/>
+                <a16:creationId xmlns:a16="http://schemas.microsoft.com/office/drawing/2014/main" id="{042C8679-A691-E655-D96C-8ABCFC3596BB}"/>
               </a:ext>
             </a:extLst>
           </p:cNvPr>
@@ -1451,7 +1451,7 @@
           <p:cNvPr id="4" name="コンテンツ プレースホルダー 3">
             <a:extLst>
               <a:ext uri="{FF2B5EF4-FFF2-40B4-BE49-F238E27FC236}">
-                <a16:creationId xmlns:a16="http://schemas.microsoft.com/office/drawing/2014/main" id="{7EC82A25-558B-6B0F-188B-00E57182BF5C}"/>
+                <a16:creationId xmlns:a16="http://schemas.microsoft.com/office/drawing/2014/main" id="{E58C13A0-84DD-42B8-6AD5-E296581C5761}"/>
               </a:ext>
             </a:extLst>
           </p:cNvPr>
@@ -1545,7 +1545,7 @@
           <p:cNvPr id="5" name="日付プレースホルダー 4">
             <a:extLst>
               <a:ext uri="{FF2B5EF4-FFF2-40B4-BE49-F238E27FC236}">
-                <a16:creationId xmlns:a16="http://schemas.microsoft.com/office/drawing/2014/main" id="{001A4941-777E-4DF1-F407-AB5C6F8B869D}"/>
+                <a16:creationId xmlns:a16="http://schemas.microsoft.com/office/drawing/2014/main" id="{CBC36D42-2096-F164-6392-0CDF0796B9E2}"/>
               </a:ext>
             </a:extLst>
           </p:cNvPr>
@@ -1561,7 +1561,7 @@
           <a:bodyPr/>
           <a:lstStyle/>
           <a:p>
-            <a:fld id="{DF3A6EFA-88EA-4349-A907-4CCED1D37C3D}" type="datetimeFigureOut">
+            <a:fld id="{6BDD9C9E-7EEE-42A7-A8E8-05EE873ECF07}" type="datetimeFigureOut">
               <a:rPr kumimoji="1" lang="ja-JP" altLang="en-US" smtClean="0"/>
               <a:t>2026/7/30</a:t>
             </a:fld>
@@ -1574,7 +1574,7 @@
           <p:cNvPr id="6" name="フッター プレースホルダー 5">
             <a:extLst>
               <a:ext uri="{FF2B5EF4-FFF2-40B4-BE49-F238E27FC236}">
-                <a16:creationId xmlns:a16="http://schemas.microsoft.com/office/drawing/2014/main" id="{BD2ADA49-394C-E2EE-2AF1-E58DB9A0F8FE}"/>
+                <a16:creationId xmlns:a16="http://schemas.microsoft.com/office/drawing/2014/main" id="{3D67CD7B-1AA0-75C1-EF79-8728EB9F3D8F}"/>
               </a:ext>
             </a:extLst>
           </p:cNvPr>
@@ -1599,7 +1599,7 @@
           <p:cNvPr id="7" name="スライド番号プレースホルダー 6">
             <a:extLst>
               <a:ext uri="{FF2B5EF4-FFF2-40B4-BE49-F238E27FC236}">
-                <a16:creationId xmlns:a16="http://schemas.microsoft.com/office/drawing/2014/main" id="{B43E9D32-D05D-7065-62CE-CD43BA392260}"/>
+                <a16:creationId xmlns:a16="http://schemas.microsoft.com/office/drawing/2014/main" id="{270C6A4B-E3E0-D47E-1143-9013D851DD1B}"/>
               </a:ext>
             </a:extLst>
           </p:cNvPr>
@@ -1615,7 +1615,7 @@
           <a:bodyPr/>
           <a:lstStyle/>
           <a:p>
-            <a:fld id="{76AEAAE9-A891-4A45-9E32-2D4073FAA241}" type="slidenum">
+            <a:fld id="{08EBE590-C0B3-4EE4-8B51-79293CFBB6A6}" type="slidenum">
               <a:rPr kumimoji="1" lang="ja-JP" altLang="en-US" smtClean="0"/>
               <a:t>‹#›</a:t>
             </a:fld>
@@ -1626,7 +1626,7 @@
     </p:spTree>
     <p:extLst>
       <p:ext uri="{BB962C8B-B14F-4D97-AF65-F5344CB8AC3E}">
-        <p14:creationId xmlns:p14="http://schemas.microsoft.com/office/powerpoint/2010/main" val="3941898349"/>
+        <p14:creationId xmlns:p14="http://schemas.microsoft.com/office/powerpoint/2010/main" val="4197703562"/>
       </p:ext>
     </p:extLst>
   </p:cSld>
@@ -1658,7 +1658,7 @@
           <p:cNvPr id="2" name="タイトル 1">
             <a:extLst>
               <a:ext uri="{FF2B5EF4-FFF2-40B4-BE49-F238E27FC236}">
-                <a16:creationId xmlns:a16="http://schemas.microsoft.com/office/drawing/2014/main" id="{152C8313-EC3A-2CED-4D02-E8A9F903BA57}"/>
+                <a16:creationId xmlns:a16="http://schemas.microsoft.com/office/drawing/2014/main" id="{553B8566-5A23-24E7-BED5-C65EC85D8F26}"/>
               </a:ext>
             </a:extLst>
           </p:cNvPr>
@@ -1691,7 +1691,7 @@
           <p:cNvPr id="3" name="テキスト プレースホルダー 2">
             <a:extLst>
               <a:ext uri="{FF2B5EF4-FFF2-40B4-BE49-F238E27FC236}">
-                <a16:creationId xmlns:a16="http://schemas.microsoft.com/office/drawing/2014/main" id="{65A37F99-31D7-982F-487D-193D57B6D3A0}"/>
+                <a16:creationId xmlns:a16="http://schemas.microsoft.com/office/drawing/2014/main" id="{965F5866-44FD-B1CD-8D11-E77B030E810D}"/>
               </a:ext>
             </a:extLst>
           </p:cNvPr>
@@ -1762,7 +1762,7 @@
           <p:cNvPr id="4" name="コンテンツ プレースホルダー 3">
             <a:extLst>
               <a:ext uri="{FF2B5EF4-FFF2-40B4-BE49-F238E27FC236}">
-                <a16:creationId xmlns:a16="http://schemas.microsoft.com/office/drawing/2014/main" id="{6D3B4F72-4C77-BDEA-82B2-34055CA235A6}"/>
+                <a16:creationId xmlns:a16="http://schemas.microsoft.com/office/drawing/2014/main" id="{5CB9A38B-C4FF-9046-A73E-6C1B55FE6B91}"/>
               </a:ext>
             </a:extLst>
           </p:cNvPr>
@@ -1856,7 +1856,7 @@
           <p:cNvPr id="5" name="テキスト プレースホルダー 4">
             <a:extLst>
               <a:ext uri="{FF2B5EF4-FFF2-40B4-BE49-F238E27FC236}">
-                <a16:creationId xmlns:a16="http://schemas.microsoft.com/office/drawing/2014/main" id="{3EC43FF4-B644-E612-C827-A2D8AD288FE0}"/>
+                <a16:creationId xmlns:a16="http://schemas.microsoft.com/office/drawing/2014/main" id="{11F89E6A-7B2B-16A3-9509-4A322CB38B2B}"/>
               </a:ext>
             </a:extLst>
           </p:cNvPr>
@@ -1927,7 +1927,7 @@
           <p:cNvPr id="6" name="コンテンツ プレースホルダー 5">
             <a:extLst>
               <a:ext uri="{FF2B5EF4-FFF2-40B4-BE49-F238E27FC236}">
-                <a16:creationId xmlns:a16="http://schemas.microsoft.com/office/drawing/2014/main" id="{F6AFB9F5-05A6-4521-6006-73FDDA0D25BB}"/>
+                <a16:creationId xmlns:a16="http://schemas.microsoft.com/office/drawing/2014/main" id="{7FB85008-3D5C-5007-CE1A-E59381B25B36}"/>
               </a:ext>
             </a:extLst>
           </p:cNvPr>
@@ -2021,7 +2021,7 @@
           <p:cNvPr id="7" name="日付プレースホルダー 6">
             <a:extLst>
               <a:ext uri="{FF2B5EF4-FFF2-40B4-BE49-F238E27FC236}">
-                <a16:creationId xmlns:a16="http://schemas.microsoft.com/office/drawing/2014/main" id="{1CFC7716-8E1C-862A-5939-BF6B92F9F65D}"/>
+                <a16:creationId xmlns:a16="http://schemas.microsoft.com/office/drawing/2014/main" id="{D81309F3-BAA6-89C0-C2D5-A55F4E06FE07}"/>
               </a:ext>
             </a:extLst>
           </p:cNvPr>
@@ -2037,7 +2037,7 @@
           <a:bodyPr/>
           <a:lstStyle/>
           <a:p>
-            <a:fld id="{DF3A6EFA-88EA-4349-A907-4CCED1D37C3D}" type="datetimeFigureOut">
+            <a:fld id="{6BDD9C9E-7EEE-42A7-A8E8-05EE873ECF07}" type="datetimeFigureOut">
               <a:rPr kumimoji="1" lang="ja-JP" altLang="en-US" smtClean="0"/>
               <a:t>2026/7/30</a:t>
             </a:fld>
@@ -2050,7 +2050,7 @@
           <p:cNvPr id="8" name="フッター プレースホルダー 7">
             <a:extLst>
               <a:ext uri="{FF2B5EF4-FFF2-40B4-BE49-F238E27FC236}">
-                <a16:creationId xmlns:a16="http://schemas.microsoft.com/office/drawing/2014/main" id="{36B8934D-6996-33FC-B72D-8424D9E8A79E}"/>
+                <a16:creationId xmlns:a16="http://schemas.microsoft.com/office/drawing/2014/main" id="{7FF1C1AA-45D1-29B3-0B4C-B8E4AC3C8527}"/>
               </a:ext>
             </a:extLst>
           </p:cNvPr>
@@ -2075,7 +2075,7 @@
           <p:cNvPr id="9" name="スライド番号プレースホルダー 8">
             <a:extLst>
               <a:ext uri="{FF2B5EF4-FFF2-40B4-BE49-F238E27FC236}">
-                <a16:creationId xmlns:a16="http://schemas.microsoft.com/office/drawing/2014/main" id="{0802C454-F670-AB68-005B-75A3833CAB44}"/>
+                <a16:creationId xmlns:a16="http://schemas.microsoft.com/office/drawing/2014/main" id="{453BB2C2-6DFA-2F8D-B4F9-93CD062A274A}"/>
               </a:ext>
             </a:extLst>
           </p:cNvPr>
@@ -2091,7 +2091,7 @@
           <a:bodyPr/>
           <a:lstStyle/>
           <a:p>
-            <a:fld id="{76AEAAE9-A891-4A45-9E32-2D4073FAA241}" type="slidenum">
+            <a:fld id="{08EBE590-C0B3-4EE4-8B51-79293CFBB6A6}" type="slidenum">
               <a:rPr kumimoji="1" lang="ja-JP" altLang="en-US" smtClean="0"/>
               <a:t>‹#›</a:t>
             </a:fld>
@@ -2102,7 +2102,7 @@
     </p:spTree>
     <p:extLst>
       <p:ext uri="{BB962C8B-B14F-4D97-AF65-F5344CB8AC3E}">
-        <p14:creationId xmlns:p14="http://schemas.microsoft.com/office/powerpoint/2010/main" val="3913395724"/>
+        <p14:creationId xmlns:p14="http://schemas.microsoft.com/office/powerpoint/2010/main" val="2510593844"/>
       </p:ext>
     </p:extLst>
   </p:cSld>
@@ -2134,7 +2134,7 @@
           <p:cNvPr id="2" name="タイトル 1">
             <a:extLst>
               <a:ext uri="{FF2B5EF4-FFF2-40B4-BE49-F238E27FC236}">
-                <a16:creationId xmlns:a16="http://schemas.microsoft.com/office/drawing/2014/main" id="{4C0BFE0E-C9D5-FC2B-9BD9-3082845EC18E}"/>
+                <a16:creationId xmlns:a16="http://schemas.microsoft.com/office/drawing/2014/main" id="{CAE6948A-E18F-04C2-8BAE-A26167B9A987}"/>
               </a:ext>
             </a:extLst>
           </p:cNvPr>
@@ -2162,7 +2162,7 @@
           <p:cNvPr id="3" name="日付プレースホルダー 2">
             <a:extLst>
               <a:ext uri="{FF2B5EF4-FFF2-40B4-BE49-F238E27FC236}">
-                <a16:creationId xmlns:a16="http://schemas.microsoft.com/office/drawing/2014/main" id="{1CB22BB3-652E-9DA1-C948-34359C478930}"/>
+                <a16:creationId xmlns:a16="http://schemas.microsoft.com/office/drawing/2014/main" id="{2F038548-3008-C8A6-1A64-FB35837ED23B}"/>
               </a:ext>
             </a:extLst>
           </p:cNvPr>
@@ -2178,7 +2178,7 @@
           <a:bodyPr/>
           <a:lstStyle/>
           <a:p>
-            <a:fld id="{DF3A6EFA-88EA-4349-A907-4CCED1D37C3D}" type="datetimeFigureOut">
+            <a:fld id="{6BDD9C9E-7EEE-42A7-A8E8-05EE873ECF07}" type="datetimeFigureOut">
               <a:rPr kumimoji="1" lang="ja-JP" altLang="en-US" smtClean="0"/>
               <a:t>2026/7/30</a:t>
             </a:fld>
@@ -2191,7 +2191,7 @@
           <p:cNvPr id="4" name="フッター プレースホルダー 3">
             <a:extLst>
               <a:ext uri="{FF2B5EF4-FFF2-40B4-BE49-F238E27FC236}">
-                <a16:creationId xmlns:a16="http://schemas.microsoft.com/office/drawing/2014/main" id="{1EA3065B-34DE-B8BA-8AAC-ED07E1270562}"/>
+                <a16:creationId xmlns:a16="http://schemas.microsoft.com/office/drawing/2014/main" id="{832CF225-2980-D8FC-6598-75B44A27B82F}"/>
               </a:ext>
             </a:extLst>
           </p:cNvPr>
@@ -2216,7 +2216,7 @@
           <p:cNvPr id="5" name="スライド番号プレースホルダー 4">
             <a:extLst>
               <a:ext uri="{FF2B5EF4-FFF2-40B4-BE49-F238E27FC236}">
-                <a16:creationId xmlns:a16="http://schemas.microsoft.com/office/drawing/2014/main" id="{3C6E2D30-921C-061F-5E02-6178E072F86C}"/>
+                <a16:creationId xmlns:a16="http://schemas.microsoft.com/office/drawing/2014/main" id="{15C55CFA-4DB1-590F-34BA-8DBC4953B35F}"/>
               </a:ext>
             </a:extLst>
           </p:cNvPr>
@@ -2232,7 +2232,7 @@
           <a:bodyPr/>
           <a:lstStyle/>
           <a:p>
-            <a:fld id="{76AEAAE9-A891-4A45-9E32-2D4073FAA241}" type="slidenum">
+            <a:fld id="{08EBE590-C0B3-4EE4-8B51-79293CFBB6A6}" type="slidenum">
               <a:rPr kumimoji="1" lang="ja-JP" altLang="en-US" smtClean="0"/>
               <a:t>‹#›</a:t>
             </a:fld>
@@ -2243,7 +2243,7 @@
     </p:spTree>
     <p:extLst>
       <p:ext uri="{BB962C8B-B14F-4D97-AF65-F5344CB8AC3E}">
-        <p14:creationId xmlns:p14="http://schemas.microsoft.com/office/powerpoint/2010/main" val="2821783144"/>
+        <p14:creationId xmlns:p14="http://schemas.microsoft.com/office/powerpoint/2010/main" val="139347266"/>
       </p:ext>
     </p:extLst>
   </p:cSld>
@@ -2275,7 +2275,7 @@
           <p:cNvPr id="2" name="日付プレースホルダー 1">
             <a:extLst>
               <a:ext uri="{FF2B5EF4-FFF2-40B4-BE49-F238E27FC236}">
-                <a16:creationId xmlns:a16="http://schemas.microsoft.com/office/drawing/2014/main" id="{56B4E416-1D78-FDA1-A8D8-0D835B17AF08}"/>
+                <a16:creationId xmlns:a16="http://schemas.microsoft.com/office/drawing/2014/main" id="{4F6C1A38-669E-88BB-D80C-7778CE8C25D8}"/>
               </a:ext>
             </a:extLst>
           </p:cNvPr>
@@ -2291,7 +2291,7 @@
           <a:bodyPr/>
           <a:lstStyle/>
           <a:p>
-            <a:fld id="{DF3A6EFA-88EA-4349-A907-4CCED1D37C3D}" type="datetimeFigureOut">
+            <a:fld id="{6BDD9C9E-7EEE-42A7-A8E8-05EE873ECF07}" type="datetimeFigureOut">
               <a:rPr kumimoji="1" lang="ja-JP" altLang="en-US" smtClean="0"/>
               <a:t>2026/7/30</a:t>
             </a:fld>
@@ -2304,7 +2304,7 @@
           <p:cNvPr id="3" name="フッター プレースホルダー 2">
             <a:extLst>
               <a:ext uri="{FF2B5EF4-FFF2-40B4-BE49-F238E27FC236}">
-                <a16:creationId xmlns:a16="http://schemas.microsoft.com/office/drawing/2014/main" id="{4B070751-64A7-C0FB-9645-67FC580BBFCB}"/>
+                <a16:creationId xmlns:a16="http://schemas.microsoft.com/office/drawing/2014/main" id="{010BC1BC-B9C2-2F59-97D8-C5786FD79E99}"/>
               </a:ext>
             </a:extLst>
           </p:cNvPr>
@@ -2329,7 +2329,7 @@
           <p:cNvPr id="4" name="スライド番号プレースホルダー 3">
             <a:extLst>
               <a:ext uri="{FF2B5EF4-FFF2-40B4-BE49-F238E27FC236}">
-                <a16:creationId xmlns:a16="http://schemas.microsoft.com/office/drawing/2014/main" id="{12828244-8663-4631-1EE1-0ADC798E03DA}"/>
+                <a16:creationId xmlns:a16="http://schemas.microsoft.com/office/drawing/2014/main" id="{480A8181-85A9-4300-14F7-241350D80072}"/>
               </a:ext>
             </a:extLst>
           </p:cNvPr>
@@ -2345,7 +2345,7 @@
           <a:bodyPr/>
           <a:lstStyle/>
           <a:p>
-            <a:fld id="{76AEAAE9-A891-4A45-9E32-2D4073FAA241}" type="slidenum">
+            <a:fld id="{08EBE590-C0B3-4EE4-8B51-79293CFBB6A6}" type="slidenum">
               <a:rPr kumimoji="1" lang="ja-JP" altLang="en-US" smtClean="0"/>
               <a:t>‹#›</a:t>
             </a:fld>
@@ -2356,7 +2356,7 @@
     </p:spTree>
     <p:extLst>
       <p:ext uri="{BB962C8B-B14F-4D97-AF65-F5344CB8AC3E}">
-        <p14:creationId xmlns:p14="http://schemas.microsoft.com/office/powerpoint/2010/main" val="2193032516"/>
+        <p14:creationId xmlns:p14="http://schemas.microsoft.com/office/powerpoint/2010/main" val="2996563973"/>
       </p:ext>
     </p:extLst>
   </p:cSld>
@@ -2388,7 +2388,7 @@
           <p:cNvPr id="2" name="タイトル 1">
             <a:extLst>
               <a:ext uri="{FF2B5EF4-FFF2-40B4-BE49-F238E27FC236}">
-                <a16:creationId xmlns:a16="http://schemas.microsoft.com/office/drawing/2014/main" id="{89F8663B-981C-D8E3-4A76-7F88DB105838}"/>
+                <a16:creationId xmlns:a16="http://schemas.microsoft.com/office/drawing/2014/main" id="{CE7F6637-E347-EE35-8634-005008E11078}"/>
               </a:ext>
             </a:extLst>
           </p:cNvPr>
@@ -2425,7 +2425,7 @@
           <p:cNvPr id="3" name="コンテンツ プレースホルダー 2">
             <a:extLst>
               <a:ext uri="{FF2B5EF4-FFF2-40B4-BE49-F238E27FC236}">
-                <a16:creationId xmlns:a16="http://schemas.microsoft.com/office/drawing/2014/main" id="{B2EA3C4B-4F62-9013-EBD7-C03D4ABE2E9C}"/>
+                <a16:creationId xmlns:a16="http://schemas.microsoft.com/office/drawing/2014/main" id="{CED3AFFA-D093-A1C7-DA18-556B76434044}"/>
               </a:ext>
             </a:extLst>
           </p:cNvPr>
@@ -2547,7 +2547,7 @@
           <p:cNvPr id="4" name="テキスト プレースホルダー 3">
             <a:extLst>
               <a:ext uri="{FF2B5EF4-FFF2-40B4-BE49-F238E27FC236}">
-                <a16:creationId xmlns:a16="http://schemas.microsoft.com/office/drawing/2014/main" id="{B7688A9E-DC08-E78F-AA36-5B6147B220B1}"/>
+                <a16:creationId xmlns:a16="http://schemas.microsoft.com/office/drawing/2014/main" id="{6A5C1C06-8085-B633-B3A1-D19A1B293639}"/>
               </a:ext>
             </a:extLst>
           </p:cNvPr>
@@ -2618,7 +2618,7 @@
           <p:cNvPr id="5" name="日付プレースホルダー 4">
             <a:extLst>
               <a:ext uri="{FF2B5EF4-FFF2-40B4-BE49-F238E27FC236}">
-                <a16:creationId xmlns:a16="http://schemas.microsoft.com/office/drawing/2014/main" id="{E34EB414-46B7-BC14-0D00-3BCD04B26FF7}"/>
+                <a16:creationId xmlns:a16="http://schemas.microsoft.com/office/drawing/2014/main" id="{9A4C9E85-D379-CA66-5D96-2CE69CA7C3A1}"/>
               </a:ext>
             </a:extLst>
           </p:cNvPr>
@@ -2634,7 +2634,7 @@
           <a:bodyPr/>
           <a:lstStyle/>
           <a:p>
-            <a:fld id="{DF3A6EFA-88EA-4349-A907-4CCED1D37C3D}" type="datetimeFigureOut">
+            <a:fld id="{6BDD9C9E-7EEE-42A7-A8E8-05EE873ECF07}" type="datetimeFigureOut">
               <a:rPr kumimoji="1" lang="ja-JP" altLang="en-US" smtClean="0"/>
               <a:t>2026/7/30</a:t>
             </a:fld>
@@ -2647,7 +2647,7 @@
           <p:cNvPr id="6" name="フッター プレースホルダー 5">
             <a:extLst>
               <a:ext uri="{FF2B5EF4-FFF2-40B4-BE49-F238E27FC236}">
-                <a16:creationId xmlns:a16="http://schemas.microsoft.com/office/drawing/2014/main" id="{99962904-20AE-7436-432A-33D7ADD463E8}"/>
+                <a16:creationId xmlns:a16="http://schemas.microsoft.com/office/drawing/2014/main" id="{8DE9C0A5-05F3-4B01-2B71-0E32258D1789}"/>
               </a:ext>
             </a:extLst>
           </p:cNvPr>
@@ -2672,7 +2672,7 @@
           <p:cNvPr id="7" name="スライド番号プレースホルダー 6">
             <a:extLst>
               <a:ext uri="{FF2B5EF4-FFF2-40B4-BE49-F238E27FC236}">
-                <a16:creationId xmlns:a16="http://schemas.microsoft.com/office/drawing/2014/main" id="{E5ED09DE-5D79-97C8-D3C4-DC65CB0AE0AE}"/>
+                <a16:creationId xmlns:a16="http://schemas.microsoft.com/office/drawing/2014/main" id="{3BA398C3-1648-7EA8-E97B-0447055A60F8}"/>
               </a:ext>
             </a:extLst>
           </p:cNvPr>
@@ -2688,7 +2688,7 @@
           <a:bodyPr/>
           <a:lstStyle/>
           <a:p>
-            <a:fld id="{76AEAAE9-A891-4A45-9E32-2D4073FAA241}" type="slidenum">
+            <a:fld id="{08EBE590-C0B3-4EE4-8B51-79293CFBB6A6}" type="slidenum">
               <a:rPr kumimoji="1" lang="ja-JP" altLang="en-US" smtClean="0"/>
               <a:t>‹#›</a:t>
             </a:fld>
@@ -2699,7 +2699,7 @@
     </p:spTree>
     <p:extLst>
       <p:ext uri="{BB962C8B-B14F-4D97-AF65-F5344CB8AC3E}">
-        <p14:creationId xmlns:p14="http://schemas.microsoft.com/office/powerpoint/2010/main" val="4100364971"/>
+        <p14:creationId xmlns:p14="http://schemas.microsoft.com/office/powerpoint/2010/main" val="3660023412"/>
       </p:ext>
     </p:extLst>
   </p:cSld>
@@ -2731,7 +2731,7 @@
           <p:cNvPr id="2" name="タイトル 1">
             <a:extLst>
               <a:ext uri="{FF2B5EF4-FFF2-40B4-BE49-F238E27FC236}">
-                <a16:creationId xmlns:a16="http://schemas.microsoft.com/office/drawing/2014/main" id="{6817C95B-B0FD-9FB8-7738-F88D8B8C341C}"/>
+                <a16:creationId xmlns:a16="http://schemas.microsoft.com/office/drawing/2014/main" id="{513CA002-1485-C104-B9C1-09732FD7D89A}"/>
               </a:ext>
             </a:extLst>
           </p:cNvPr>
@@ -2768,7 +2768,7 @@
           <p:cNvPr id="3" name="図プレースホルダー 2">
             <a:extLst>
               <a:ext uri="{FF2B5EF4-FFF2-40B4-BE49-F238E27FC236}">
-                <a16:creationId xmlns:a16="http://schemas.microsoft.com/office/drawing/2014/main" id="{B30021F6-F248-573F-7214-9F4820D1314F}"/>
+                <a16:creationId xmlns:a16="http://schemas.microsoft.com/office/drawing/2014/main" id="{88DD9B29-6D01-6E1C-9E48-D955FF656B45}"/>
               </a:ext>
             </a:extLst>
           </p:cNvPr>
@@ -2835,7 +2835,7 @@
           <p:cNvPr id="4" name="テキスト プレースホルダー 3">
             <a:extLst>
               <a:ext uri="{FF2B5EF4-FFF2-40B4-BE49-F238E27FC236}">
-                <a16:creationId xmlns:a16="http://schemas.microsoft.com/office/drawing/2014/main" id="{7E81DA3F-D77C-E63C-B6F9-EC786F913442}"/>
+                <a16:creationId xmlns:a16="http://schemas.microsoft.com/office/drawing/2014/main" id="{CC5CCF33-CEFE-9CD2-4A2D-FD04330E8DB0}"/>
               </a:ext>
             </a:extLst>
           </p:cNvPr>
@@ -2906,7 +2906,7 @@
           <p:cNvPr id="5" name="日付プレースホルダー 4">
             <a:extLst>
               <a:ext uri="{FF2B5EF4-FFF2-40B4-BE49-F238E27FC236}">
-                <a16:creationId xmlns:a16="http://schemas.microsoft.com/office/drawing/2014/main" id="{7FC56B2D-C418-CFCA-FD85-6B1E64AB1C00}"/>
+                <a16:creationId xmlns:a16="http://schemas.microsoft.com/office/drawing/2014/main" id="{33E5AA4F-F3CB-62CC-7744-B4C79C561E49}"/>
               </a:ext>
             </a:extLst>
           </p:cNvPr>
@@ -2922,7 +2922,7 @@
           <a:bodyPr/>
           <a:lstStyle/>
           <a:p>
-            <a:fld id="{DF3A6EFA-88EA-4349-A907-4CCED1D37C3D}" type="datetimeFigureOut">
+            <a:fld id="{6BDD9C9E-7EEE-42A7-A8E8-05EE873ECF07}" type="datetimeFigureOut">
               <a:rPr kumimoji="1" lang="ja-JP" altLang="en-US" smtClean="0"/>
               <a:t>2026/7/30</a:t>
             </a:fld>
@@ -2935,7 +2935,7 @@
           <p:cNvPr id="6" name="フッター プレースホルダー 5">
             <a:extLst>
               <a:ext uri="{FF2B5EF4-FFF2-40B4-BE49-F238E27FC236}">
-                <a16:creationId xmlns:a16="http://schemas.microsoft.com/office/drawing/2014/main" id="{FB99D6EA-0573-3EC1-4DD8-4A8BFE59D220}"/>
+                <a16:creationId xmlns:a16="http://schemas.microsoft.com/office/drawing/2014/main" id="{409B8596-D30E-CAF1-3C1A-AB0C18232659}"/>
               </a:ext>
             </a:extLst>
           </p:cNvPr>
@@ -2960,7 +2960,7 @@
           <p:cNvPr id="7" name="スライド番号プレースホルダー 6">
             <a:extLst>
               <a:ext uri="{FF2B5EF4-FFF2-40B4-BE49-F238E27FC236}">
-                <a16:creationId xmlns:a16="http://schemas.microsoft.com/office/drawing/2014/main" id="{F9C16D7D-7B0F-1117-0AB4-89602A637F21}"/>
+                <a16:creationId xmlns:a16="http://schemas.microsoft.com/office/drawing/2014/main" id="{5B2CEE88-E67A-F89C-264E-ADB3B2014EC0}"/>
               </a:ext>
             </a:extLst>
           </p:cNvPr>
@@ -2976,7 +2976,7 @@
           <a:bodyPr/>
           <a:lstStyle/>
           <a:p>
-            <a:fld id="{76AEAAE9-A891-4A45-9E32-2D4073FAA241}" type="slidenum">
+            <a:fld id="{08EBE590-C0B3-4EE4-8B51-79293CFBB6A6}" type="slidenum">
               <a:rPr kumimoji="1" lang="ja-JP" altLang="en-US" smtClean="0"/>
               <a:t>‹#›</a:t>
             </a:fld>
@@ -2987,7 +2987,7 @@
     </p:spTree>
     <p:extLst>
       <p:ext uri="{BB962C8B-B14F-4D97-AF65-F5344CB8AC3E}">
-        <p14:creationId xmlns:p14="http://schemas.microsoft.com/office/powerpoint/2010/main" val="2579312852"/>
+        <p14:creationId xmlns:p14="http://schemas.microsoft.com/office/powerpoint/2010/main" val="3064462289"/>
       </p:ext>
     </p:extLst>
   </p:cSld>
@@ -3024,7 +3024,7 @@
           <p:cNvPr id="2" name="タイトル プレースホルダー 1">
             <a:extLst>
               <a:ext uri="{FF2B5EF4-FFF2-40B4-BE49-F238E27FC236}">
-                <a16:creationId xmlns:a16="http://schemas.microsoft.com/office/drawing/2014/main" id="{F0C3B808-0571-F6EF-6782-09F3E98AF634}"/>
+                <a16:creationId xmlns:a16="http://schemas.microsoft.com/office/drawing/2014/main" id="{E4F1E588-F595-0AEA-003D-EE01E44E8576}"/>
               </a:ext>
             </a:extLst>
           </p:cNvPr>
@@ -3062,7 +3062,7 @@
           <p:cNvPr id="3" name="テキスト プレースホルダー 2">
             <a:extLst>
               <a:ext uri="{FF2B5EF4-FFF2-40B4-BE49-F238E27FC236}">
-                <a16:creationId xmlns:a16="http://schemas.microsoft.com/office/drawing/2014/main" id="{E8D45950-0D9E-F476-9B4C-AB0E22477C62}"/>
+                <a16:creationId xmlns:a16="http://schemas.microsoft.com/office/drawing/2014/main" id="{AAA98990-AEEA-DC72-A32F-D2FEB2780DAD}"/>
               </a:ext>
             </a:extLst>
           </p:cNvPr>
@@ -3161,7 +3161,7 @@
           <p:cNvPr id="4" name="日付プレースホルダー 3">
             <a:extLst>
               <a:ext uri="{FF2B5EF4-FFF2-40B4-BE49-F238E27FC236}">
-                <a16:creationId xmlns:a16="http://schemas.microsoft.com/office/drawing/2014/main" id="{319E4038-4313-78DB-7D13-E71C3C00C17B}"/>
+                <a16:creationId xmlns:a16="http://schemas.microsoft.com/office/drawing/2014/main" id="{0B6976C6-3BFC-3D4F-765C-37A1155A306C}"/>
               </a:ext>
             </a:extLst>
           </p:cNvPr>
@@ -3195,7 +3195,7 @@
             </a:lvl1pPr>
           </a:lstStyle>
           <a:p>
-            <a:fld id="{DF3A6EFA-88EA-4349-A907-4CCED1D37C3D}" type="datetimeFigureOut">
+            <a:fld id="{6BDD9C9E-7EEE-42A7-A8E8-05EE873ECF07}" type="datetimeFigureOut">
               <a:rPr kumimoji="1" lang="ja-JP" altLang="en-US" smtClean="0"/>
               <a:t>2026/7/30</a:t>
             </a:fld>
@@ -3208,7 +3208,7 @@
           <p:cNvPr id="5" name="フッター プレースホルダー 4">
             <a:extLst>
               <a:ext uri="{FF2B5EF4-FFF2-40B4-BE49-F238E27FC236}">
-                <a16:creationId xmlns:a16="http://schemas.microsoft.com/office/drawing/2014/main" id="{FCF5F8D8-D931-0E35-2D62-18E3B7B2D737}"/>
+                <a16:creationId xmlns:a16="http://schemas.microsoft.com/office/drawing/2014/main" id="{B60595C8-8633-5991-919A-07AED036C35F}"/>
               </a:ext>
             </a:extLst>
           </p:cNvPr>
@@ -3251,7 +3251,7 @@
           <p:cNvPr id="6" name="スライド番号プレースホルダー 5">
             <a:extLst>
               <a:ext uri="{FF2B5EF4-FFF2-40B4-BE49-F238E27FC236}">
-                <a16:creationId xmlns:a16="http://schemas.microsoft.com/office/drawing/2014/main" id="{6B198808-8458-1296-0626-14666E4545B0}"/>
+                <a16:creationId xmlns:a16="http://schemas.microsoft.com/office/drawing/2014/main" id="{1963F610-6E81-9B31-B5D7-5A99B9A7023E}"/>
               </a:ext>
             </a:extLst>
           </p:cNvPr>
@@ -3285,7 +3285,7 @@
             </a:lvl1pPr>
           </a:lstStyle>
           <a:p>
-            <a:fld id="{76AEAAE9-A891-4A45-9E32-2D4073FAA241}" type="slidenum">
+            <a:fld id="{08EBE590-C0B3-4EE4-8B51-79293CFBB6A6}" type="slidenum">
               <a:rPr kumimoji="1" lang="ja-JP" altLang="en-US" smtClean="0"/>
               <a:t>‹#›</a:t>
             </a:fld>
@@ -3296,7 +3296,7 @@
     </p:spTree>
     <p:extLst>
       <p:ext uri="{BB962C8B-B14F-4D97-AF65-F5344CB8AC3E}">
-        <p14:creationId xmlns:p14="http://schemas.microsoft.com/office/powerpoint/2010/main" val="1213289943"/>
+        <p14:creationId xmlns:p14="http://schemas.microsoft.com/office/powerpoint/2010/main" val="3429319702"/>
       </p:ext>
     </p:extLst>
   </p:cSld>
@@ -3619,7 +3619,7 @@
           <p:cNvPr id="2" name="テキスト ボックス 1">
             <a:extLst>
               <a:ext uri="{FF2B5EF4-FFF2-40B4-BE49-F238E27FC236}">
-                <a16:creationId xmlns:a16="http://schemas.microsoft.com/office/drawing/2014/main" id="{522F5975-BEB5-0496-160B-60B553E0A221}"/>
+                <a16:creationId xmlns:a16="http://schemas.microsoft.com/office/drawing/2014/main" id="{6F3BA89D-8DCC-C30F-EC91-B5C5E4B3D004}"/>
               </a:ext>
             </a:extLst>
           </p:cNvPr>
@@ -3665,7 +3665,7 @@
           <p:cNvPr id="3" name="テキスト ボックス 2">
             <a:extLst>
               <a:ext uri="{FF2B5EF4-FFF2-40B4-BE49-F238E27FC236}">
-                <a16:creationId xmlns:a16="http://schemas.microsoft.com/office/drawing/2014/main" id="{8E5AE634-B0F4-990F-3425-67A0A7566CF2}"/>
+                <a16:creationId xmlns:a16="http://schemas.microsoft.com/office/drawing/2014/main" id="{52F223E6-8232-B880-61F2-DDB207AFDE16}"/>
               </a:ext>
             </a:extLst>
           </p:cNvPr>
@@ -3714,7 +3714,7 @@
           <p:cNvPr id="4" name="テキスト ボックス 3">
             <a:extLst>
               <a:ext uri="{FF2B5EF4-FFF2-40B4-BE49-F238E27FC236}">
-                <a16:creationId xmlns:a16="http://schemas.microsoft.com/office/drawing/2014/main" id="{182EEE2E-D855-B6EC-0827-9FAD962E108D}"/>
+                <a16:creationId xmlns:a16="http://schemas.microsoft.com/office/drawing/2014/main" id="{E1C8B42A-8F24-7981-431D-76572A4588BA}"/>
               </a:ext>
             </a:extLst>
           </p:cNvPr>
@@ -3754,7 +3754,7 @@
           <p:cNvPr id="5" name="テキスト ボックス 4">
             <a:extLst>
               <a:ext uri="{FF2B5EF4-FFF2-40B4-BE49-F238E27FC236}">
-                <a16:creationId xmlns:a16="http://schemas.microsoft.com/office/drawing/2014/main" id="{715A5BCC-0AF5-3173-D633-395FDE11C54A}"/>
+                <a16:creationId xmlns:a16="http://schemas.microsoft.com/office/drawing/2014/main" id="{8D25C19D-431A-CD81-3906-457565C4A7B4}"/>
               </a:ext>
             </a:extLst>
           </p:cNvPr>
@@ -3801,7 +3801,7 @@
             <a:hlinkClick r:id="" action="ppaction://media"/>
             <a:extLst>
               <a:ext uri="{FF2B5EF4-FFF2-40B4-BE49-F238E27FC236}">
-                <a16:creationId xmlns:a16="http://schemas.microsoft.com/office/drawing/2014/main" id="{757ACF7D-9742-F4AA-84D3-C34A8F039E2D}"/>
+                <a16:creationId xmlns:a16="http://schemas.microsoft.com/office/drawing/2014/main" id="{010900C6-392D-6731-950B-EE84EBA48ABC}"/>
               </a:ext>
             </a:extLst>
           </p:cNvPr>
@@ -3836,7 +3836,7 @@
     </p:spTree>
     <p:extLst>
       <p:ext uri="{BB962C8B-B14F-4D97-AF65-F5344CB8AC3E}">
-        <p14:creationId xmlns:p14="http://schemas.microsoft.com/office/powerpoint/2010/main" val="2576367185"/>
+        <p14:creationId xmlns:p14="http://schemas.microsoft.com/office/powerpoint/2010/main" val="2422245175"/>
       </p:ext>
     </p:extLst>
   </p:cSld>
@@ -3960,7 +3960,7 @@
           <p:cNvPr id="2" name="テキスト ボックス 1">
             <a:extLst>
               <a:ext uri="{FF2B5EF4-FFF2-40B4-BE49-F238E27FC236}">
-                <a16:creationId xmlns:a16="http://schemas.microsoft.com/office/drawing/2014/main" id="{5BE78586-2476-2199-82A1-E89E99373CEF}"/>
+                <a16:creationId xmlns:a16="http://schemas.microsoft.com/office/drawing/2014/main" id="{AEBA2D93-1B88-2B19-339C-1A589A1B169F}"/>
               </a:ext>
             </a:extLst>
           </p:cNvPr>
@@ -4006,7 +4006,7 @@
           <p:cNvPr id="3" name="テキスト ボックス 2">
             <a:extLst>
               <a:ext uri="{FF2B5EF4-FFF2-40B4-BE49-F238E27FC236}">
-                <a16:creationId xmlns:a16="http://schemas.microsoft.com/office/drawing/2014/main" id="{26485D54-3251-97B1-3671-C8D51ED0BD79}"/>
+                <a16:creationId xmlns:a16="http://schemas.microsoft.com/office/drawing/2014/main" id="{5E61C8DD-CA08-DCC3-DE7E-1893E3773E59}"/>
               </a:ext>
             </a:extLst>
           </p:cNvPr>
@@ -4046,7 +4046,7 @@
           <p:cNvPr id="4" name="テキスト ボックス 3">
             <a:extLst>
               <a:ext uri="{FF2B5EF4-FFF2-40B4-BE49-F238E27FC236}">
-                <a16:creationId xmlns:a16="http://schemas.microsoft.com/office/drawing/2014/main" id="{1C1B482A-3B7B-A8A7-F233-6A1F2A1EECE6}"/>
+                <a16:creationId xmlns:a16="http://schemas.microsoft.com/office/drawing/2014/main" id="{C2061552-987A-6E76-95D4-D31D9EAED452}"/>
               </a:ext>
             </a:extLst>
           </p:cNvPr>
@@ -4056,7 +4056,7 @@
         <p:spPr>
           <a:xfrm>
             <a:off x="533400" y="3429000"/>
-            <a:ext cx="10795000" cy="707886"/>
+            <a:ext cx="10795000" cy="400110"/>
           </a:xfrm>
           <a:prstGeom prst="rect">
             <a:avLst/>
@@ -4076,14 +4076,17 @@
                 </a:solidFill>
                 <a:latin typeface="Arial" panose="020B0604020202020204" pitchFamily="34" charset="0"/>
               </a:rPr>
-              <a:t>Anchor Suggest Search Recommended repository: anchor suggest search Confirmed domain: anchorsuggest</a:t>
-            </a:r>
-            <a:endParaRPr kumimoji="1" lang="ja-JP" altLang="en-US" sz="2000">
-              <a:solidFill>
-                <a:srgbClr val="333333"/>
-              </a:solidFill>
-              <a:latin typeface="Arial" panose="020B0604020202020204" pitchFamily="34" charset="0"/>
-            </a:endParaRPr>
+              <a:t>Anchor Suggest Search</a:t>
+            </a:r>
+            <a:r>
+              <a:rPr kumimoji="1" lang="ja-JP" altLang="en-US" sz="2000">
+                <a:solidFill>
+                  <a:srgbClr val="333333"/>
+                </a:solidFill>
+                <a:latin typeface="Arial" panose="020B0604020202020204" pitchFamily="34" charset="0"/>
+              </a:rPr>
+              <a:t>の目的、構成、実装を公開コードから確認できるプロジェクトです。</a:t>
+            </a:r>
           </a:p>
         </p:txBody>
       </p:sp>
@@ -4092,7 +4095,7 @@
           <p:cNvPr id="5" name="テキスト ボックス 4">
             <a:extLst>
               <a:ext uri="{FF2B5EF4-FFF2-40B4-BE49-F238E27FC236}">
-                <a16:creationId xmlns:a16="http://schemas.microsoft.com/office/drawing/2014/main" id="{CE7E2309-B12C-EC17-58A5-39AA55EEFB0C}"/>
+                <a16:creationId xmlns:a16="http://schemas.microsoft.com/office/drawing/2014/main" id="{CC4ED7C1-FC46-A892-2FE5-E27744C5B059}"/>
               </a:ext>
             </a:extLst>
           </p:cNvPr>
@@ -4139,7 +4142,7 @@
             <a:hlinkClick r:id="" action="ppaction://media"/>
             <a:extLst>
               <a:ext uri="{FF2B5EF4-FFF2-40B4-BE49-F238E27FC236}">
-                <a16:creationId xmlns:a16="http://schemas.microsoft.com/office/drawing/2014/main" id="{6900E8B0-52DA-83A9-2DAE-F6E7D1A8B534}"/>
+                <a16:creationId xmlns:a16="http://schemas.microsoft.com/office/drawing/2014/main" id="{D4B2F238-A82A-B077-4A80-F52F17761091}"/>
               </a:ext>
             </a:extLst>
           </p:cNvPr>
@@ -4174,7 +4177,7 @@
     </p:spTree>
     <p:extLst>
       <p:ext uri="{BB962C8B-B14F-4D97-AF65-F5344CB8AC3E}">
-        <p14:creationId xmlns:p14="http://schemas.microsoft.com/office/powerpoint/2010/main" val="3888794693"/>
+        <p14:creationId xmlns:p14="http://schemas.microsoft.com/office/powerpoint/2010/main" val="3817950560"/>
       </p:ext>
     </p:extLst>
   </p:cSld>
@@ -4183,10 +4186,10 @@
   </p:clrMapOvr>
   <mc:AlternateContent xmlns:mc="http://schemas.openxmlformats.org/markup-compatibility/2006">
     <mc:Choice xmlns:p14="http://schemas.microsoft.com/office/powerpoint/2010/main" Requires="p14">
-      <p:transition spd="slow" p14:dur="2000" advTm="9000"/>
+      <p:transition spd="slow" p14:dur="2000" advTm="8000"/>
     </mc:Choice>
     <mc:Fallback>
-      <p:transition spd="slow" advTm="9000"/>
+      <p:transition spd="slow" advTm="8000"/>
     </mc:Fallback>
   </mc:AlternateContent>
   <p:timing>
@@ -4217,7 +4220,7 @@
                                   <p:childTnLst>
                                     <p:cmd type="call" cmd="playFrom(0.0)">
                                       <p:cBhvr>
-                                        <p:cTn id="6" dur="8106" fill="hold"/>
+                                        <p:cTn id="6" dur="7681" fill="hold"/>
                                         <p:tgtEl>
                                           <p:spTgt spid="6"/>
                                         </p:tgtEl>
@@ -4298,7 +4301,7 @@
           <p:cNvPr id="2" name="テキスト ボックス 1">
             <a:extLst>
               <a:ext uri="{FF2B5EF4-FFF2-40B4-BE49-F238E27FC236}">
-                <a16:creationId xmlns:a16="http://schemas.microsoft.com/office/drawing/2014/main" id="{EF0B1BF1-3CEA-94A6-6B80-1F7BF70BDED9}"/>
+                <a16:creationId xmlns:a16="http://schemas.microsoft.com/office/drawing/2014/main" id="{77DB2678-5188-BE56-72C3-BB23E3DF6504}"/>
               </a:ext>
             </a:extLst>
           </p:cNvPr>
@@ -4344,7 +4347,7 @@
           <p:cNvPr id="3" name="テキスト ボックス 2">
             <a:extLst>
               <a:ext uri="{FF2B5EF4-FFF2-40B4-BE49-F238E27FC236}">
-                <a16:creationId xmlns:a16="http://schemas.microsoft.com/office/drawing/2014/main" id="{FB71F38E-532E-DF66-7771-7506DB317837}"/>
+                <a16:creationId xmlns:a16="http://schemas.microsoft.com/office/drawing/2014/main" id="{1F91C38E-4745-09A2-BC36-B653F73EE580}"/>
               </a:ext>
             </a:extLst>
           </p:cNvPr>
@@ -4384,7 +4387,7 @@
           <p:cNvPr id="4" name="テキスト ボックス 3">
             <a:extLst>
               <a:ext uri="{FF2B5EF4-FFF2-40B4-BE49-F238E27FC236}">
-                <a16:creationId xmlns:a16="http://schemas.microsoft.com/office/drawing/2014/main" id="{9AA6670B-9779-179D-7FC6-0AC905CD45EB}"/>
+                <a16:creationId xmlns:a16="http://schemas.microsoft.com/office/drawing/2014/main" id="{106D5CAE-8621-C6E2-04D1-8019C0EA5FBF}"/>
               </a:ext>
             </a:extLst>
           </p:cNvPr>
@@ -4479,7 +4482,7 @@
           <p:cNvPr id="5" name="テキスト ボックス 4">
             <a:extLst>
               <a:ext uri="{FF2B5EF4-FFF2-40B4-BE49-F238E27FC236}">
-                <a16:creationId xmlns:a16="http://schemas.microsoft.com/office/drawing/2014/main" id="{865DD631-5E5F-2A0B-4676-33BE156F7EF9}"/>
+                <a16:creationId xmlns:a16="http://schemas.microsoft.com/office/drawing/2014/main" id="{6CF291C6-411C-6D4B-F41C-DB25022B6804}"/>
               </a:ext>
             </a:extLst>
           </p:cNvPr>
@@ -4526,7 +4529,7 @@
             <a:hlinkClick r:id="" action="ppaction://media"/>
             <a:extLst>
               <a:ext uri="{FF2B5EF4-FFF2-40B4-BE49-F238E27FC236}">
-                <a16:creationId xmlns:a16="http://schemas.microsoft.com/office/drawing/2014/main" id="{877D384B-55E7-762F-61F2-2C5AA844F6A3}"/>
+                <a16:creationId xmlns:a16="http://schemas.microsoft.com/office/drawing/2014/main" id="{9105021C-E191-3D02-87A1-8D0B20966725}"/>
               </a:ext>
             </a:extLst>
           </p:cNvPr>
@@ -4561,7 +4564,7 @@
     </p:spTree>
     <p:extLst>
       <p:ext uri="{BB962C8B-B14F-4D97-AF65-F5344CB8AC3E}">
-        <p14:creationId xmlns:p14="http://schemas.microsoft.com/office/powerpoint/2010/main" val="2838890344"/>
+        <p14:creationId xmlns:p14="http://schemas.microsoft.com/office/powerpoint/2010/main" val="418933429"/>
       </p:ext>
     </p:extLst>
   </p:cSld>
@@ -4685,7 +4688,7 @@
           <p:cNvPr id="2" name="テキスト ボックス 1">
             <a:extLst>
               <a:ext uri="{FF2B5EF4-FFF2-40B4-BE49-F238E27FC236}">
-                <a16:creationId xmlns:a16="http://schemas.microsoft.com/office/drawing/2014/main" id="{323B99F2-E244-C8DE-4EAB-A78C072313DE}"/>
+                <a16:creationId xmlns:a16="http://schemas.microsoft.com/office/drawing/2014/main" id="{CC0E4F29-ABE6-D148-09F4-8222BEA26540}"/>
               </a:ext>
             </a:extLst>
           </p:cNvPr>
@@ -4731,7 +4734,7 @@
           <p:cNvPr id="3" name="テキスト ボックス 2">
             <a:extLst>
               <a:ext uri="{FF2B5EF4-FFF2-40B4-BE49-F238E27FC236}">
-                <a16:creationId xmlns:a16="http://schemas.microsoft.com/office/drawing/2014/main" id="{3A01B8AC-1225-71BA-AEF9-AAC832EA1FAB}"/>
+                <a16:creationId xmlns:a16="http://schemas.microsoft.com/office/drawing/2014/main" id="{A654D1C9-A553-BBDC-033B-235C6EA5FA51}"/>
               </a:ext>
             </a:extLst>
           </p:cNvPr>
@@ -4771,7 +4774,7 @@
           <p:cNvPr id="4" name="テキスト ボックス 3">
             <a:extLst>
               <a:ext uri="{FF2B5EF4-FFF2-40B4-BE49-F238E27FC236}">
-                <a16:creationId xmlns:a16="http://schemas.microsoft.com/office/drawing/2014/main" id="{288D221A-F11B-33F0-ECE9-593F08988528}"/>
+                <a16:creationId xmlns:a16="http://schemas.microsoft.com/office/drawing/2014/main" id="{548B94A8-F293-5024-DE58-E9EA0B41DF5E}"/>
               </a:ext>
             </a:extLst>
           </p:cNvPr>
@@ -4881,7 +4884,7 @@
           <p:cNvPr id="5" name="テキスト ボックス 4">
             <a:extLst>
               <a:ext uri="{FF2B5EF4-FFF2-40B4-BE49-F238E27FC236}">
-                <a16:creationId xmlns:a16="http://schemas.microsoft.com/office/drawing/2014/main" id="{F791EB2A-E2BF-B583-C49E-DD98833D6270}"/>
+                <a16:creationId xmlns:a16="http://schemas.microsoft.com/office/drawing/2014/main" id="{371139E1-871E-5570-C435-63D7B7C3D2EE}"/>
               </a:ext>
             </a:extLst>
           </p:cNvPr>
@@ -4928,7 +4931,7 @@
             <a:hlinkClick r:id="" action="ppaction://media"/>
             <a:extLst>
               <a:ext uri="{FF2B5EF4-FFF2-40B4-BE49-F238E27FC236}">
-                <a16:creationId xmlns:a16="http://schemas.microsoft.com/office/drawing/2014/main" id="{D676DEF9-F702-7ACE-2FF5-FCBE58C8BF20}"/>
+                <a16:creationId xmlns:a16="http://schemas.microsoft.com/office/drawing/2014/main" id="{98C112A8-5FEC-8812-1938-D16A785652B9}"/>
               </a:ext>
             </a:extLst>
           </p:cNvPr>
@@ -4963,7 +4966,7 @@
     </p:spTree>
     <p:extLst>
       <p:ext uri="{BB962C8B-B14F-4D97-AF65-F5344CB8AC3E}">
-        <p14:creationId xmlns:p14="http://schemas.microsoft.com/office/powerpoint/2010/main" val="2248888150"/>
+        <p14:creationId xmlns:p14="http://schemas.microsoft.com/office/powerpoint/2010/main" val="2595216392"/>
       </p:ext>
     </p:extLst>
   </p:cSld>
@@ -5087,7 +5090,7 @@
           <p:cNvPr id="2" name="テキスト ボックス 1">
             <a:extLst>
               <a:ext uri="{FF2B5EF4-FFF2-40B4-BE49-F238E27FC236}">
-                <a16:creationId xmlns:a16="http://schemas.microsoft.com/office/drawing/2014/main" id="{568FE746-EFF6-EDEA-8DC7-C2267521A95D}"/>
+                <a16:creationId xmlns:a16="http://schemas.microsoft.com/office/drawing/2014/main" id="{46331175-977C-8E8A-B423-985FE90AA7FF}"/>
               </a:ext>
             </a:extLst>
           </p:cNvPr>
@@ -5133,7 +5136,7 @@
           <p:cNvPr id="3" name="テキスト ボックス 2">
             <a:extLst>
               <a:ext uri="{FF2B5EF4-FFF2-40B4-BE49-F238E27FC236}">
-                <a16:creationId xmlns:a16="http://schemas.microsoft.com/office/drawing/2014/main" id="{3D076379-1257-04E0-541E-695FABEFFC72}"/>
+                <a16:creationId xmlns:a16="http://schemas.microsoft.com/office/drawing/2014/main" id="{738E9E70-A131-7FDC-6CCB-694DA8771975}"/>
               </a:ext>
             </a:extLst>
           </p:cNvPr>
@@ -5173,7 +5176,7 @@
           <p:cNvPr id="4" name="テキスト ボックス 3">
             <a:extLst>
               <a:ext uri="{FF2B5EF4-FFF2-40B4-BE49-F238E27FC236}">
-                <a16:creationId xmlns:a16="http://schemas.microsoft.com/office/drawing/2014/main" id="{EFC2F798-28A9-6D48-4E43-4A2015C1DB4C}"/>
+                <a16:creationId xmlns:a16="http://schemas.microsoft.com/office/drawing/2014/main" id="{DBD4263A-DC63-CE94-6FA7-526AAF29997B}"/>
               </a:ext>
             </a:extLst>
           </p:cNvPr>
@@ -5197,20 +5200,14 @@
           <a:lstStyle/>
           <a:p>
             <a:r>
-              <a:rPr kumimoji="1" lang="en-US" altLang="ja-JP" sz="2000">
+              <a:rPr kumimoji="1" lang="ja-JP" altLang="en-US" sz="2000">
                 <a:solidFill>
                   <a:srgbClr val="333333"/>
                 </a:solidFill>
                 <a:latin typeface="Arial" panose="020B0604020202020204" pitchFamily="34" charset="0"/>
               </a:rPr>
-              <a:t>Set confirmed custom domain</a:t>
-            </a:r>
-            <a:endParaRPr kumimoji="1" lang="ja-JP" altLang="en-US" sz="2000">
-              <a:solidFill>
-                <a:srgbClr val="333333"/>
-              </a:solidFill>
-              <a:latin typeface="Arial" panose="020B0604020202020204" pitchFamily="34" charset="0"/>
-            </a:endParaRPr>
+              <a:t>直近のコミットでは、実装の見直しと継続的な改善が行われました。</a:t>
+            </a:r>
           </a:p>
         </p:txBody>
       </p:sp>
@@ -5219,7 +5216,7 @@
           <p:cNvPr id="5" name="テキスト ボックス 4">
             <a:extLst>
               <a:ext uri="{FF2B5EF4-FFF2-40B4-BE49-F238E27FC236}">
-                <a16:creationId xmlns:a16="http://schemas.microsoft.com/office/drawing/2014/main" id="{CA5A5083-044E-9765-2CA6-E777A7E2EA85}"/>
+                <a16:creationId xmlns:a16="http://schemas.microsoft.com/office/drawing/2014/main" id="{AC0C6B5A-5817-4DAD-9B69-E7C303859078}"/>
               </a:ext>
             </a:extLst>
           </p:cNvPr>
@@ -5266,7 +5263,7 @@
             <a:hlinkClick r:id="" action="ppaction://media"/>
             <a:extLst>
               <a:ext uri="{FF2B5EF4-FFF2-40B4-BE49-F238E27FC236}">
-                <a16:creationId xmlns:a16="http://schemas.microsoft.com/office/drawing/2014/main" id="{B234DAF2-D5F0-79D5-95F0-FC4647952D54}"/>
+                <a16:creationId xmlns:a16="http://schemas.microsoft.com/office/drawing/2014/main" id="{7E70A6A1-BC9D-4A51-080B-BD35A61F26F9}"/>
               </a:ext>
             </a:extLst>
           </p:cNvPr>
@@ -5301,7 +5298,7 @@
     </p:spTree>
     <p:extLst>
       <p:ext uri="{BB962C8B-B14F-4D97-AF65-F5344CB8AC3E}">
-        <p14:creationId xmlns:p14="http://schemas.microsoft.com/office/powerpoint/2010/main" val="1109622068"/>
+        <p14:creationId xmlns:p14="http://schemas.microsoft.com/office/powerpoint/2010/main" val="1828635199"/>
       </p:ext>
     </p:extLst>
   </p:cSld>
@@ -5344,7 +5341,7 @@
                                   <p:childTnLst>
                                     <p:cmd type="call" cmd="playFrom(0.0)">
                                       <p:cBhvr>
-                                        <p:cTn id="6" dur="6451" fill="hold"/>
+                                        <p:cTn id="6" dur="6076" fill="hold"/>
                                         <p:tgtEl>
                                           <p:spTgt spid="6"/>
                                         </p:tgtEl>
@@ -5425,7 +5422,7 @@
           <p:cNvPr id="2" name="テキスト ボックス 1">
             <a:extLst>
               <a:ext uri="{FF2B5EF4-FFF2-40B4-BE49-F238E27FC236}">
-                <a16:creationId xmlns:a16="http://schemas.microsoft.com/office/drawing/2014/main" id="{79A048D7-1C99-AD33-3B94-661FDF3DFCD7}"/>
+                <a16:creationId xmlns:a16="http://schemas.microsoft.com/office/drawing/2014/main" id="{9A8E7F6A-83D1-0028-30C5-46DE158FF5F4}"/>
               </a:ext>
             </a:extLst>
           </p:cNvPr>
@@ -5471,7 +5468,7 @@
           <p:cNvPr id="3" name="テキスト ボックス 2">
             <a:extLst>
               <a:ext uri="{FF2B5EF4-FFF2-40B4-BE49-F238E27FC236}">
-                <a16:creationId xmlns:a16="http://schemas.microsoft.com/office/drawing/2014/main" id="{3202ECEF-AA10-01EB-EAB8-1E43356C9E09}"/>
+                <a16:creationId xmlns:a16="http://schemas.microsoft.com/office/drawing/2014/main" id="{5E77968A-E80C-73DB-E2AE-62B7604DB687}"/>
               </a:ext>
             </a:extLst>
           </p:cNvPr>
@@ -5511,7 +5508,7 @@
           <p:cNvPr id="4" name="テキスト ボックス 3">
             <a:extLst>
               <a:ext uri="{FF2B5EF4-FFF2-40B4-BE49-F238E27FC236}">
-                <a16:creationId xmlns:a16="http://schemas.microsoft.com/office/drawing/2014/main" id="{93DC8440-3B5B-A716-88CD-C9295922E31F}"/>
+                <a16:creationId xmlns:a16="http://schemas.microsoft.com/office/drawing/2014/main" id="{3B12B6B7-7B07-6C23-8F3D-B76DCDAFFFA5}"/>
               </a:ext>
             </a:extLst>
           </p:cNvPr>
@@ -5576,7 +5573,7 @@
           <p:cNvPr id="5" name="テキスト ボックス 4">
             <a:extLst>
               <a:ext uri="{FF2B5EF4-FFF2-40B4-BE49-F238E27FC236}">
-                <a16:creationId xmlns:a16="http://schemas.microsoft.com/office/drawing/2014/main" id="{B748559D-B790-E8D9-C5CE-A6D308268444}"/>
+                <a16:creationId xmlns:a16="http://schemas.microsoft.com/office/drawing/2014/main" id="{4B1CEC2B-76A2-9825-7AC9-F75C9D334BFE}"/>
               </a:ext>
             </a:extLst>
           </p:cNvPr>
@@ -5623,7 +5620,7 @@
             <a:hlinkClick r:id="" action="ppaction://media"/>
             <a:extLst>
               <a:ext uri="{FF2B5EF4-FFF2-40B4-BE49-F238E27FC236}">
-                <a16:creationId xmlns:a16="http://schemas.microsoft.com/office/drawing/2014/main" id="{82B96378-2F4A-46D8-E519-3BD4DB7D0E6C}"/>
+                <a16:creationId xmlns:a16="http://schemas.microsoft.com/office/drawing/2014/main" id="{557AC1FE-1576-FD4B-F5BA-7700463A2240}"/>
               </a:ext>
             </a:extLst>
           </p:cNvPr>
@@ -5658,7 +5655,7 @@
     </p:spTree>
     <p:extLst>
       <p:ext uri="{BB962C8B-B14F-4D97-AF65-F5344CB8AC3E}">
-        <p14:creationId xmlns:p14="http://schemas.microsoft.com/office/powerpoint/2010/main" val="2920660439"/>
+        <p14:creationId xmlns:p14="http://schemas.microsoft.com/office/powerpoint/2010/main" val="3445389080"/>
       </p:ext>
     </p:extLst>
   </p:cSld>
